--- a/docs/sunum/dernek/apya-sunum-dernek.pptx
+++ b/docs/sunum/dernek/apya-sunum-dernek.pptx
@@ -20,10 +20,9 @@
     <p:sldId id="268" r:id="rId14"/>
     <p:sldId id="269" r:id="rId15"/>
     <p:sldId id="270" r:id="rId16"/>
-    <p:sldId id="271" r:id="rId17"/>
   </p:sldIdLst>
   <p:notesMasterIdLst>
-    <p:notesMasterId r:id="rId18"/>
+    <p:notesMasterId r:id="rId17"/>
   </p:notesMasterIdLst>
   <p:sldSz cx="12192000" cy="6858000"/>
   <p:notesSz cx="6858000" cy="12192000"/>
@@ -697,9 +696,9 @@
           <a:p>
             <a:r>
               <a:rPr lang="en-US" dirty="0"/>
-              <a:t>Başvuruları yapay zekâ ön eler
-Kararı siz verirsiniz — o sadece ön eleme ve gerekçe hazırlar.
-Yapay zekâ kendi kuralını uydurmaz: kriterleri siz yazarsınız, o uygular ve her puan için gerekçesini kayda geçer.</a:t>
+              <a:t>Size uygun fonu kaçırmayın
+Açık çağrılar tek listede; derneğinizin profiline uyanlar öne çıkar.
+Kazanılan fon normal bir projeye dönüşür — bütçesi, faaliyetleri ve harcama belgeleriyle aynı sistemde yürür.</a:t>
             </a:r>
             <a:endParaRPr lang="en-US" dirty="0"/>
           </a:p>
@@ -787,9 +786,9 @@
           <a:p>
             <a:r>
               <a:rPr lang="en-US" dirty="0"/>
-              <a:t>Size uygun fonu kaçırmayın
-Açık çağrılar tek listede; derneğinizin profiline uyanlar öne çıkar.
-Kazanılan fon normal bir projeye dönüşür — bütçesi, faaliyetleri ve harcama belgeleriyle aynı sistemde yürür.</a:t>
+              <a:t>Herkes yalnızca kendi işini görür
+Yetkiler modül modül açılır; kimse görmemesi gerekeni görmez.
+Roller örnektir — kendi tüzüğünüze göre yeni rol tanımlanabilir, mevcutların yetkisi tek tek değiştirilebilir. Denetim kuruluna değiştirme yetkisi olmadan görüntüleme açılır.</a:t>
             </a:r>
             <a:endParaRPr lang="en-US" dirty="0"/>
           </a:p>
@@ -877,9 +876,9 @@
           <a:p>
             <a:r>
               <a:rPr lang="en-US" dirty="0"/>
-              <a:t>Herkes yalnızca kendi işini görür
-Yetkiler modül modül açılır; kimse görmemesi gerekeni görmez.
-Roller örnektir — kendi tüzüğünüze göre yeni rol tanımlanabilir, mevcutların yetkisi tek tek değiştirilebilir. Denetim kuruluna değiştirme yetkisi olmadan görüntüleme açılır.</a:t>
+              <a:t>Şubeniz kendi kapalı alanında
+Genel merkez, şube ve temsilcilikleri tek platformda, birbirine karıştırmadan yönetirsiniz.
+Her değişiklik kim ve ne zaman bilgisiyle kayda geçer; bağışçıya ve denetime karşı hesap verirken dayanağınız olur.</a:t>
             </a:r>
             <a:endParaRPr lang="en-US" dirty="0"/>
           </a:p>
@@ -967,9 +966,9 @@
           <a:p>
             <a:r>
               <a:rPr lang="en-US" dirty="0"/>
-              <a:t>Şubeniz kendi kapalı alanında
-Genel merkez, şube ve temsilcilikleri tek platformda, birbirine karıştırmadan yönetirsiniz.
-Her değişiklik kim ve ne zaman bilgisiyle kayda geçer; bağışçıya ve denetime karşı hesap verirken dayanağınız olur.</a:t>
+              <a:t>Ofiste, sahada, yolda
+Aynı sistem üç ekran boyutunda da çalışır.
+Sahadaki ekip telefondan faaliyet günceller ve fotoğraf yükler; merkez aynı anda güncel durumu görür.</a:t>
             </a:r>
             <a:endParaRPr lang="en-US" dirty="0"/>
           </a:p>
@@ -1057,96 +1056,6 @@
           <a:p>
             <a:r>
               <a:rPr lang="en-US" dirty="0"/>
-              <a:t>Ofiste, sahada, yolda
-Aynı sistem üç ekran boyutunda da çalışır.
-Sahadaki ekip telefondan faaliyet günceller ve fotoğraf yükler; merkez aynı anda güncel durumu görür.</a:t>
-            </a:r>
-            <a:endParaRPr lang="en-US" dirty="0"/>
-          </a:p>
-        </p:txBody>
-      </p:sp>
-      <p:sp>
-        <p:nvSpPr>
-          <p:cNvPr id="4" name="Slide Number Placeholder 3"/>
-          <p:cNvSpPr>
-            <a:spLocks noGrp="1"/>
-          </p:cNvSpPr>
-          <p:nvPr>
-            <p:ph type="sldNum" sz="quarter" idx="10"/>
-          </p:nvPr>
-        </p:nvSpPr>
-        <p:spPr/>
-        <p:txBody>
-          <a:bodyPr/>
-          <a:lstStyle/>
-          <a:p>
-            <a:fld id="{F7021451-1387-4CA6-816F-3879F97B5CBC}" type="slidenum">
-              <a:rPr lang="en-US"/>
-              <a:t>15</a:t>
-            </a:fld>
-            <a:endParaRPr lang="en-US"/>
-          </a:p>
-        </p:txBody>
-      </p:sp>
-    </p:spTree>
-    <p:extLst>
-      <p:ext uri="{BB962C8B-B14F-4D97-AF65-F5344CB8AC3E}">
-        <p14:creationId xmlns:p14="http://schemas.microsoft.com/office/powerpoint/2010/main" val="1024086991"/>
-      </p:ext>
-    </p:extLst>
-  </p:cSld>
-  <p:clrMapOvr>
-    <a:masterClrMapping/>
-  </p:clrMapOvr>
-</p:notes>
-</file>
-
-<file path=ppt/notesSlides/notesSlide16.xml><?xml version="1.0" encoding="utf-8"?>
-<p:notes xmlns:a="http://schemas.openxmlformats.org/drawingml/2006/main" xmlns:r="http://schemas.openxmlformats.org/officeDocument/2006/relationships" xmlns:p="http://schemas.openxmlformats.org/presentationml/2006/main">
-  <p:cSld>
-    <p:spTree>
-      <p:nvGrpSpPr>
-        <p:cNvPr id="1" name=""/>
-        <p:cNvGrpSpPr/>
-        <p:nvPr/>
-      </p:nvGrpSpPr>
-      <p:grpSpPr>
-        <a:xfrm>
-          <a:off x="0" y="0"/>
-          <a:ext cx="0" cy="0"/>
-          <a:chOff x="0" y="0"/>
-          <a:chExt cx="0" cy="0"/>
-        </a:xfrm>
-      </p:grpSpPr>
-      <p:sp>
-        <p:nvSpPr>
-          <p:cNvPr id="2" name="Slide Image Placeholder 1"/>
-          <p:cNvSpPr>
-            <a:spLocks noGrp="1" noRot="1" noChangeAspect="1"/>
-          </p:cNvSpPr>
-          <p:nvPr>
-            <p:ph type="sldImg"/>
-          </p:nvPr>
-        </p:nvSpPr>
-        <p:spPr/>
-      </p:sp>
-      <p:sp>
-        <p:nvSpPr>
-          <p:cNvPr id="3" name="Notes Placeholder 2"/>
-          <p:cNvSpPr>
-            <a:spLocks noGrp="1"/>
-          </p:cNvSpPr>
-          <p:nvPr>
-            <p:ph type="body" idx="1"/>
-          </p:nvPr>
-        </p:nvSpPr>
-        <p:spPr/>
-        <p:txBody>
-          <a:bodyPr/>
-          <a:lstStyle/>
-          <a:p>
-            <a:r>
-              <a:rPr lang="en-US" dirty="0"/>
               <a:t>Kullanmaya başlamak: dört adım
 Her şeyi ilk gün taşımayız — önce tek bir fonla güven kurarız.</a:t>
             </a:r>
@@ -1171,7 +1080,7 @@
           <a:p>
             <a:fld id="{F7021451-1387-4CA6-816F-3879F97B5CBC}" type="slidenum">
               <a:rPr lang="en-US"/>
-              <a:t>16</a:t>
+              <a:t>15</a:t>
             </a:fld>
             <a:endParaRPr lang="en-US"/>
           </a:p>
@@ -1418,7 +1327,7 @@
               <a:rPr lang="en-US" dirty="0"/>
               <a:t>Kaynaktan rapora giden yol
 Sistemde her şey bu beş adımın üzerinde ilerler.
-Her adım bir sonrakini otomatik besler: harcamayı girdiğinizde fonun kalanı, faaliyeti bitirdiğinizde ilerleme, dönem sonunda ise mizan kendiliğinden güncellenir.</a:t>
+Her adım bir sonrakini otomatik besler: harcamayı girdiğinizde fonun kalanı, faaliyeti bitirdiğinizde ilerleme, dönem sonunda ise raporlar kendiliğinden güncellenir.</a:t>
             </a:r>
             <a:endParaRPr lang="en-US" dirty="0"/>
           </a:p>
@@ -2559,7 +2468,7 @@
     <p:bg>
       <p:bgPr>
         <a:solidFill>
-          <a:srgbClr val="FFFFFF"/>
+          <a:srgbClr val="0B1220"/>
         </a:solidFill>
       </p:bgPr>
     </p:bg>
@@ -2580,62 +2489,6 @@
       <p:pic>
         <p:nvPicPr>
           <p:cNvPr id="2" name="Image 0" descr="E:\Developer\GİT\hitprot-platform\.claude\worktrees\dernek-sunumu\docs\sunum\dernek\gorseller\slayt-15.png">    </p:cNvPr>
-          <p:cNvPicPr>
-            <a:picLocks noChangeAspect="1"/>
-          </p:cNvPicPr>
-          <p:nvPr/>
-        </p:nvPicPr>
-        <p:blipFill>
-          <a:blip r:embed="rId1"/>
-          <a:stretch>
-            <a:fillRect/>
-          </a:stretch>
-        </p:blipFill>
-        <p:spPr>
-          <a:xfrm>
-            <a:off x="0" y="0"/>
-            <a:ext cx="12191695" cy="6858000"/>
-          </a:xfrm>
-          <a:prstGeom prst="rect">
-            <a:avLst/>
-          </a:prstGeom>
-        </p:spPr>
-      </p:pic>
-    </p:spTree>
-  </p:cSld>
-  <p:clrMapOvr>
-    <a:masterClrMapping/>
-  </p:clrMapOvr>
-</p:sld>
-</file>
-
-<file path=ppt/slides/slide16.xml><?xml version="1.0" encoding="utf-8"?>
-<p:sld xmlns:a="http://schemas.openxmlformats.org/drawingml/2006/main" xmlns:r="http://schemas.openxmlformats.org/officeDocument/2006/relationships" xmlns:p="http://schemas.openxmlformats.org/presentationml/2006/main">
-  <p:cSld name="Slide 16">
-    <p:bg>
-      <p:bgPr>
-        <a:solidFill>
-          <a:srgbClr val="0B1220"/>
-        </a:solidFill>
-      </p:bgPr>
-    </p:bg>
-    <p:spTree>
-      <p:nvGrpSpPr>
-        <p:cNvPr id="1" name=""/>
-        <p:cNvGrpSpPr/>
-        <p:nvPr/>
-      </p:nvGrpSpPr>
-      <p:grpSpPr>
-        <a:xfrm>
-          <a:off x="0" y="0"/>
-          <a:ext cx="0" cy="0"/>
-          <a:chOff x="0" y="0"/>
-          <a:chExt cx="0" cy="0"/>
-        </a:xfrm>
-      </p:grpSpPr>
-      <p:pic>
-        <p:nvPicPr>
-          <p:cNvPr id="2" name="Image 0" descr="E:\Developer\GİT\hitprot-platform\.claude\worktrees\dernek-sunumu\docs\sunum\dernek\gorseller\slayt-16.png">    </p:cNvPr>
           <p:cNvPicPr>
             <a:picLocks noChangeAspect="1"/>
           </p:cNvPicPr>
